--- a/Slides/Semana 2/semana_2_slides.pptx
+++ b/Slides/Semana 2/semana_2_slides.pptx
@@ -20,9 +20,10 @@
     <p:sldId id="268" r:id="rId14"/>
     <p:sldId id="269" r:id="rId15"/>
     <p:sldId id="270" r:id="rId16"/>
+    <p:sldId id="271" r:id="rId17"/>
   </p:sldIdLst>
   <p:notesMasterIdLst>
-    <p:notesMasterId r:id="rId17"/>
+    <p:notesMasterId r:id="rId18"/>
   </p:notesMasterIdLst>
   <p:sldSz cx="12192000" cy="6858000"/>
   <p:notesSz cx="6858000" cy="12192000"/>
@@ -956,7 +957,7 @@
           <a:p>
             <a:r>
               <a:rPr lang="en-US" dirty="0"/>
-              <a:t>Notas: Fechar a mini aula amarrando os conceitos. Cada item volta aplicado na produção em estúdio. Não reler tudo — apontar a conexão com o próximo passo.</a:t>
+              <a:t>Notas: Contextualizar o valor profissional. Checkerboard/UV checker é ferramenta de verificação padrão em qualquer pipeline, não recurso didático exclusivo da disciplina. Amarra à Semana 3 e 4 (padding, texel density): o hábito de verificar UV com checker antes de seguir adiante é o mesmo que sustenta C3 até a CF6.</a:t>
             </a:r>
             <a:endParaRPr lang="en-US" dirty="0"/>
           </a:p>
@@ -999,6 +1000,94 @@
 </file>
 
 <file path=ppt/notesSlides/notesSlide15.xml><?xml version="1.0" encoding="utf-8"?>
+<p:notes xmlns:a="http://schemas.openxmlformats.org/drawingml/2006/main" xmlns:r="http://schemas.openxmlformats.org/officeDocument/2006/relationships" xmlns:p="http://schemas.openxmlformats.org/presentationml/2006/main">
+  <p:cSld>
+    <p:spTree>
+      <p:nvGrpSpPr>
+        <p:cNvPr id="1" name=""/>
+        <p:cNvGrpSpPr/>
+        <p:nvPr/>
+      </p:nvGrpSpPr>
+      <p:grpSpPr>
+        <a:xfrm>
+          <a:off x="0" y="0"/>
+          <a:ext cx="0" cy="0"/>
+          <a:chOff x="0" y="0"/>
+          <a:chExt cx="0" cy="0"/>
+        </a:xfrm>
+      </p:grpSpPr>
+      <p:sp>
+        <p:nvSpPr>
+          <p:cNvPr id="2" name="Slide Image Placeholder 1"/>
+          <p:cNvSpPr>
+            <a:spLocks noGrp="1" noRot="1" noChangeAspect="1"/>
+          </p:cNvSpPr>
+          <p:nvPr>
+            <p:ph type="sldImg"/>
+          </p:nvPr>
+        </p:nvSpPr>
+        <p:spPr/>
+      </p:sp>
+      <p:sp>
+        <p:nvSpPr>
+          <p:cNvPr id="3" name="Notes Placeholder 2"/>
+          <p:cNvSpPr>
+            <a:spLocks noGrp="1"/>
+          </p:cNvSpPr>
+          <p:nvPr>
+            <p:ph type="body" idx="1"/>
+          </p:nvPr>
+        </p:nvSpPr>
+        <p:spPr/>
+        <p:txBody>
+          <a:bodyPr/>
+          <a:lstStyle/>
+          <a:p>
+            <a:r>
+              <a:rPr lang="en-US" dirty="0"/>
+              <a:t>Notas: Fechar a mini aula amarrando os conceitos. Cada item volta aplicado na produção em estúdio. Não reler tudo — apontar a conexão com o próximo passo.</a:t>
+            </a:r>
+            <a:endParaRPr lang="en-US" dirty="0"/>
+          </a:p>
+        </p:txBody>
+      </p:sp>
+      <p:sp>
+        <p:nvSpPr>
+          <p:cNvPr id="4" name="Slide Number Placeholder 3"/>
+          <p:cNvSpPr>
+            <a:spLocks noGrp="1"/>
+          </p:cNvSpPr>
+          <p:nvPr>
+            <p:ph type="sldNum" sz="quarter" idx="10"/>
+          </p:nvPr>
+        </p:nvSpPr>
+        <p:spPr/>
+        <p:txBody>
+          <a:bodyPr/>
+          <a:lstStyle/>
+          <a:p>
+            <a:fld id="{F7021451-1387-4CA6-816F-3879F97B5CBC}" type="slidenum">
+              <a:rPr lang="en-US"/>
+              <a:t>15</a:t>
+            </a:fld>
+            <a:endParaRPr lang="en-US"/>
+          </a:p>
+        </p:txBody>
+      </p:sp>
+    </p:spTree>
+    <p:extLst>
+      <p:ext uri="{BB962C8B-B14F-4D97-AF65-F5344CB8AC3E}">
+        <p14:creationId xmlns:p14="http://schemas.microsoft.com/office/powerpoint/2010/main" val="1024086991"/>
+      </p:ext>
+    </p:extLst>
+  </p:cSld>
+  <p:clrMapOvr>
+    <a:masterClrMapping/>
+  </p:clrMapOvr>
+</p:notes>
+</file>
+
+<file path=ppt/notesSlides/notesSlide16.xml><?xml version="1.0" encoding="utf-8"?>
 <p:notes xmlns:a="http://schemas.openxmlformats.org/drawingml/2006/main" xmlns:r="http://schemas.openxmlformats.org/officeDocument/2006/relationships" xmlns:p="http://schemas.openxmlformats.org/presentationml/2006/main">
   <p:cSld>
     <p:spTree>
@@ -1071,7 +1160,7 @@
           <a:p>
             <a:fld id="{F7021451-1387-4CA6-816F-3879F97B5CBC}" type="slidenum">
               <a:rPr lang="en-US"/>
-              <a:t>15</a:t>
+              <a:t>16</a:t>
             </a:fld>
             <a:endParaRPr lang="en-US"/>
           </a:p>
@@ -2354,6 +2443,45 @@
 <file path=ppt/slides/slide15.xml><?xml version="1.0" encoding="utf-8"?>
 <p:sld xmlns:a="http://schemas.openxmlformats.org/drawingml/2006/main" xmlns:r="http://schemas.openxmlformats.org/officeDocument/2006/relationships" xmlns:p="http://schemas.openxmlformats.org/presentationml/2006/main">
   <p:cSld name="Slide 15">
+    <p:bg>
+      <p:bgPr>
+        <a:blipFill dpi="0" rotWithShape="1">
+          <a:blip r:embed="rId1">
+            <a:lum/>
+          </a:blip>
+          <a:srcRect/>
+          <a:stretch>
+            <a:fillRect/>
+          </a:stretch>
+        </a:blipFill>
+        <a:effectLst/>
+      </p:bgPr>
+    </p:bg>
+    <p:spTree>
+      <p:nvGrpSpPr>
+        <p:cNvPr id="1" name=""/>
+        <p:cNvGrpSpPr/>
+        <p:nvPr/>
+      </p:nvGrpSpPr>
+      <p:grpSpPr>
+        <a:xfrm>
+          <a:off x="0" y="0"/>
+          <a:ext cx="0" cy="0"/>
+          <a:chOff x="0" y="0"/>
+          <a:chExt cx="0" cy="0"/>
+        </a:xfrm>
+      </p:grpSpPr>
+    </p:spTree>
+  </p:cSld>
+  <p:clrMapOvr>
+    <a:masterClrMapping/>
+  </p:clrMapOvr>
+</p:sld>
+</file>
+
+<file path=ppt/slides/slide16.xml><?xml version="1.0" encoding="utf-8"?>
+<p:sld xmlns:a="http://schemas.openxmlformats.org/drawingml/2006/main" xmlns:r="http://schemas.openxmlformats.org/officeDocument/2006/relationships" xmlns:p="http://schemas.openxmlformats.org/presentationml/2006/main">
+  <p:cSld name="Slide 16">
     <p:bg>
       <p:bgPr>
         <a:blipFill dpi="0" rotWithShape="1">

--- a/Slides/Semana 2/semana_2_slides.pptx
+++ b/Slides/Semana 2/semana_2_slides.pptx
@@ -517,7 +517,7 @@
           <a:p>
             <a:r>
               <a:rPr lang="en-US" dirty="0"/>
-              <a:t>Notas: Abertura da mini aula (20 min). Não é tutorial — é a construção da intuição conceitual antes de abrir o Blender na demonstração. Lembrar que esta é a primeira vez que a turma abre o UV Editor com intenção de trabalho.</a:t>
+              <a:t>Notas: Esta é a primeira semana em que a turma opera o Blender com intenção de trabalho. Na Semana 1 houve apenas orientação espacial, sem prática. Abrir deixando isso explícito.</a:t>
             </a:r>
             <a:endParaRPr lang="en-US" dirty="0"/>
           </a:p>
@@ -605,7 +605,12 @@
           <a:p>
             <a:r>
               <a:rPr lang="en-US" dirty="0"/>
-              <a:t>Notas: O checker é a ferramenta central da semana. No Blender, ativar via Z → Material Preview após conectar a textura ao Principled BSDF. ANTECIPAR o erro comum: aplicar a textura no UV Editor mas esquecer de ativar o Material Preview no Viewport.</a:t>
+              <a:t>Notas: Esta é a imagem-chave da aula — usar para a transição direta ao "vamos testar isso ao vivo" da demonstração.
+[!FIGURA]
+Objetivo didático — Mostrar num único quadro comparativo que a escolha de projeção muda o resultado visível, tornando tangível algo que só a palavra "distorção" não comunica.
+Arquivo sugerido — assets/comparativo_projecoes_uv.webp
+Descrição — Grade 2×2 com a mesma esfera renderizada com checkerboard, uma célula por tipo de projeção (Planar, Cilíndrica, Esférica, Cúbica), cada uma rotulada. Nas células de Esférica e Planar, destacar em vermelho leve as áreas de maior distorção (polos e bordas).
+Como produzir — No Blender, aplicar cada tipo de projeção UV na mesma esfera com material de checkerboard e capturar o render em Material Preview. Montar a grade 2×2 com rótulos no Krita, adicionando os destaques de distorção com um pincel semitransparente.</a:t>
             </a:r>
             <a:endParaRPr lang="en-US" dirty="0"/>
           </a:p>
@@ -693,7 +698,7 @@
           <a:p>
             <a:r>
               <a:rPr lang="en-US" dirty="0"/>
-              <a:t>Notas: Este é o ponto conceitual mais difícil da semana — os dois problemas se parecem no checker mas são distintos. Distorção se corrige com melhor projeção/seam; sobreposição se corrige separando as islands. Usar o UV Stretch Overlay para mostrar a distorção isoladamente.</a:t>
+              <a:t>Notas: Distorção e sobreposição são problemas diferentes, frequentemente confundidos. Vai ser o principal ponto de dúvida no estúdio — reforçar aqui para reduzir retrabalho na demonstração.</a:t>
             </a:r>
             <a:endParaRPr lang="en-US" dirty="0"/>
           </a:p>
@@ -781,7 +786,7 @@
           <a:p>
             <a:r>
               <a:rPr lang="en-US" dirty="0"/>
-              <a:t>Notas: NÃO entrar em fórmulas agora. Só a intuição "island maior = mais nítida". Se perguntarem valores exatos: "Vamos medir na Semana 4 — por enquanto, use o checker para ver se parece uniforme."</a:t>
+              <a:t>Notas: Smart UV Project entra na demonstração como recurso rápido, não como solução final. A revisão manual de seams começa de fato na Semana 4, quando há um asset real (Hero Asset Referência) em jogo.</a:t>
             </a:r>
             <a:endParaRPr lang="en-US" dirty="0"/>
           </a:p>
@@ -869,7 +874,7 @@
           <a:p>
             <a:r>
               <a:rPr lang="en-US" dirty="0"/>
-              <a:t>Notas: O primeiro é o problema técnico número 1 da semana; fixar Z → Material Preview como verificação obrigatória. O segundo é uma questão de expectativa — a solução (seams) é Semana 3. Recontextualizar erros de UV como economia de trabalho futuro.</a:t>
+              <a:t>Notas: Antecipação intencional, sem fórmula. Se um estudante perguntar por valores numéricos, responder: "vamos medir isso na Semana 5 — por enquanto, use o olho e o checker."</a:t>
             </a:r>
             <a:endParaRPr lang="en-US" dirty="0"/>
           </a:p>
@@ -957,7 +962,7 @@
           <a:p>
             <a:r>
               <a:rPr lang="en-US" dirty="0"/>
-              <a:t>Notas: Contextualizar o valor profissional. Checkerboard/UV checker é ferramenta de verificação padrão em qualquer pipeline, não recurso didático exclusivo da disciplina. Amarra à Semana 3 e 4 (padding, texel density): o hábito de verificar UV com checker antes de seguir adiante é o mesmo que sustenta C3 até a CF6.</a:t>
+              <a:t>Notas: Contextualizar o valor profissional do cuidado com UV, que parece "burocrático" nesta fase introdutória. Amarra ao C3 (UV Mapping) da Rubrica Mestre, já ativo nesta semana.</a:t>
             </a:r>
             <a:endParaRPr lang="en-US" dirty="0"/>
           </a:p>
@@ -1045,7 +1050,7 @@
           <a:p>
             <a:r>
               <a:rPr lang="en-US" dirty="0"/>
-              <a:t>Notas: Fechar a mini aula amarrando os conceitos. Cada item volta aplicado na produção em estúdio. Não reler tudo — apontar a conexão com o próximo passo.</a:t>
+              <a:t>Notas: Fechar amarrando os conceitos antes da demonstração. Não reler linha a linha — apontar que tudo isso será testado ao vivo em seguida, nos três objetos do arquivo de prática.</a:t>
             </a:r>
             <a:endParaRPr lang="en-US" dirty="0"/>
           </a:p>
@@ -1133,11 +1138,12 @@
           <a:p>
             <a:r>
               <a:rPr lang="en-US" dirty="0"/>
-              <a:t>Notas: Transição para a demonstração de 20 min. Configurar o layout: Viewport 3D à esquerda, UV Editor à direita — usaremos esse layout dividido a semana toda. Seams manuais NÃO entram hoje: "Agora entendemos o problema. Semana que vem, aprendemos a controlar onde cortar."
-FIGURA (produzir) — assets/demo_layout_blender.webp
-Objetivo: orientar visualmente o layout de tela dividido (Viewport 3D + UV Editor) que será usado durante toda a demonstração e o estúdio.
-Descrição: captura do Blender com a janela dividida: à esquerda o Viewport 3D com um cubo em Material Preview e checkerboard; à direita o UV Editor com as islands do mesmo cubo.
-Como produzir: no Blender, montar o layout dividido descrito, carregar o checkerboard e capturar a tela cheia. Opcionalmente, no Krita, rotular "Viewport 3D" e "UV Editor" sobre cada painel.</a:t>
+              <a:t>Notas: Transição para os 20 min de demonstração. Layout de tela padrão a partir de hoje: Viewport 3D à esquerda, UV Editor à direita. Deixar claro que seams manuais não entram nesta demonstração — isso é Semana 4.
+[!FIGURA]
+Objetivo didático — Antecipar visualmente o layout de tela que será usado durante toda a demonstração e a produção em estúdio, para que o estudante já configure sua própria tela da mesma forma.
+Arquivo sugerido — assets/blender_uv_editor_layout.webp
+Descrição — Captura da interface do Blender dividida em duas áreas lado a lado: Viewport 3D à esquerda (mostrando um objeto com checkerboard em Material Preview) e UV Editor à direita (mostrando o layout UV correspondente). Um rótulo simples identifica cada painel.
+Como produzir — No Blender, configurar o layout de tela dividido, aplicar checkerboard em Material Preview e capturar a interface completa. Adicionar os dois rótulos no Krita.</a:t>
             </a:r>
             <a:endParaRPr lang="en-US" dirty="0"/>
           </a:p>
@@ -1225,7 +1231,7 @@
           <a:p>
             <a:r>
               <a:rPr lang="en-US" dirty="0"/>
-              <a:t>Notas: Ler rápido. Cada objetivo volta ao longo da aula. Não detalhar agora. Texel density entra apenas como intuição — o cálculo numérico é Semana 4.</a:t>
+              <a:t>Notas: Revisão de 30 segundos, não uma retomada de conteúdo. Reforçar que tema e Hero Asset Referência só fecham na Semana 3 — hoje ninguém trabalha "no seu tema", e sim em objetos neutros de prática.</a:t>
             </a:r>
             <a:endParaRPr lang="en-US" dirty="0"/>
           </a:p>
@@ -1313,7 +1319,7 @@
           <a:p>
             <a:r>
               <a:rPr lang="en-US" dirty="0"/>
-              <a:t>Notas: Deixar 2–3 respostas da turma antes de apresentar a analogia da caixa de papelão. Não corrigir — usar as respostas como ponte para o conceito de "desdobrar".</a:t>
+              <a:t>Notas: Ler rápido. Os quatro objetivos são cobertos na mini aula e praticados na demonstração e no estúdio. O quarto item é só intuição — o cálculo formal de texel density é conteúdo da Semana 5, não desta.</a:t>
             </a:r>
             <a:endParaRPr lang="en-US" dirty="0"/>
           </a:p>
@@ -1401,11 +1407,7 @@
           <a:p>
             <a:r>
               <a:rPr lang="en-US" dirty="0"/>
-              <a:t>Notas: Esta é a imagem mental central da semana. "Cortar as dobras" antecipa o conceito de seam (Semana 3), mas NÃO nomear seam ainda em profundidade — apenas plantar a ideia de que existe um corte.
-FIGURA (produzir) — assets/analogia_caixa_uv.webp
-Objetivo: tornar concreta a ideia de "desdobrar" um objeto 3D em um plano 2D, ancorando o conceito abstrato de UV na experiência física de abrir uma caixa.
-Descrição: um cubo 3D à esquerda e, à direita, o mesmo cubo "aberto" em forma de cruz (planificação) sobre o quadrado da textura, com as faces numeradas para mostrar a correspondência.
-Como produzir: no Blender, criar um cubo, aplicar Cube Projection e posicionar o Viewport 3D ao lado do UV Editor. Renderizar ou capturar as duas visões. No Krita, montar a comparação lado a lado e numerar as faces correspondentes.</a:t>
+              <a:t>Notas: Deixar 2–3 respostas da turma antes de seguir. A resposta que queremos chegar: é preciso um sistema de coordenadas que relacione cada ponto da superfície 3D a um ponto da imagem 2D — isso é o mapa UV.</a:t>
             </a:r>
             <a:endParaRPr lang="en-US" dirty="0"/>
           </a:p>
@@ -1493,11 +1495,7 @@
           <a:p>
             <a:r>
               <a:rPr lang="en-US" dirty="0"/>
-              <a:t>Notas: Fixar que U e V vão de 0 a 1, independentemente da resolução da textura. Mostrar o cubo aberto ao lado da textura que o cobre. Não falar em UDIMs ou tiles múltiplas — isso é muito à frente.
-FIGURA (produzir) — assets/espaco_uv_0_1.webp
-Objetivo: mostrar que o espaço UV é um quadrado normalizado (0–1) onde as islands do objeto são posicionadas sobre a textura.
-Descrição: o UV Editor do Blender com os eixos rotulados 0 e 1, uma textura checkerboard preenchendo o quadrado e as islands de um cubo posicionadas sobre ela.
-Como produzir: no Blender, abrir o UV Editor com um cubo desdobrado e checkerboard carregado. Capturar a tela e, no Krita, adicionar os rótulos "0" e "1" nos cantos dos eixos U e V.</a:t>
+              <a:t>Notas: Fixar essa analogia — ela volta em todas as semanas de UV do semestre. Não citar "seams" como operação ainda: seams manuais são conteúdo da Semana 4 (Hero Asset Referência). Aqui é só nomear o conceito. Referência: apostila, Parte II, Cap. 4.</a:t>
             </a:r>
             <a:endParaRPr lang="en-US" dirty="0"/>
           </a:p>
@@ -1585,7 +1583,7 @@
           <a:p>
             <a:r>
               <a:rPr lang="en-US" dirty="0"/>
-              <a:t>Notas: Comparação com o mapa-múndi (projeção de Mercator) funciona muito bem. Reforçar a mudança de expectativa: nesta semana o sucesso é OBSERVAR e NOMEAR a distorção, não zerá-la. Isso previne a paralisia do "quero deixar perfeito".</a:t>
+              <a:t>Notas: O quadrado 0–1 é o mesmo para qualquer objeto, do prop mais simples ao asset mais complexo do kit. É a base de tudo que vem depois no semestre — bake, atlas e trim sheet, mais adiante, também operam dentro desse mesmo espaço.</a:t>
             </a:r>
             <a:endParaRPr lang="en-US" dirty="0"/>
           </a:p>
@@ -1673,7 +1671,12 @@
           <a:p>
             <a:r>
               <a:rPr lang="en-US" dirty="0"/>
-              <a:t>Notas: Introduzir as quatro projeções como um menu de ferramentas, cada uma boa para uma família de formas. Os próximos slides detalham uma a uma com uma frase cada. Não sobrecarregar.</a:t>
+              <a:t>Notas: Primeira imagem concreta da relação objeto ↔ UV Editor ↔ textura. Vai ser revisitada na demonstração, ao vivo no Blender.
+[!FIGURA]
+Objetivo didático — Tornar concreta a relação entre a malha 3D, o layout UV e a textura aplicada, antes de qualquer prática no Blender.
+Arquivo sugerido — assets/cubo_uv_checker.webp
+Descrição — Composição em três partes lado a lado: (1) um cubo 3D com checkerboard aplicado no viewport; (2) o mesmo cubo desdobrado no UV Editor, mostrando as 6 faces organizadas como ilhas; (3) a textura de checkerboard isolada. Setas leves conectando as três partes.
+Como produzir — No Blender, aplicar Cube Projection em um cubo, ativar Material Preview com uma textura de checkerboard, e capturar o Viewport e o UV Editor lado a lado. Montar a composição final no Krita, adicionando a textura isolada e as setas de conexão.</a:t>
             </a:r>
             <a:endParaRPr lang="en-US" dirty="0"/>
           </a:p>
@@ -1761,11 +1764,7 @@
           <a:p>
             <a:r>
               <a:rPr lang="en-US" dirty="0"/>
-              <a:t>Notas: Emparelhar planar e cilíndrica porque são as mais intuitivas. Pedir exemplos concretos à turma: "que peça do kit de vocês seria planar? qual seria cilíndrica?". Conectar ao projeto integrador.
-FIGURA (produzir) — assets/projecao_planar_cilindrica.webp
-Objetivo: associar cada projeção à família de formas onde ela distorce menos, comparando visualmente o checkerboard resultante.
-Descrição: à esquerda, um plano/parede com projeção planar e checker uniforme; à direita, um cilindro com projeção cilíndrica mostrando o seam vertical e o grid regular no corpo.
-Como produzir: no Blender, aplicar Project From View (planar) em um plano e Cylinder Projection em um cilindro, ambos com checkerboard. Capturar Viewport + UV Editor e montar lado a lado no Krita.</a:t>
+              <a:t>Notas: Analogia do mapa-múndi costuma ser eficaz porque é uma experiência visual que a maioria já teve (Groenlândia "gigante" na projeção Mercator). Não aprofundar em geometria — é só para instalar a intuição de que distorção é inevitável, e o trabalho do artista é administrá-la.</a:t>
             </a:r>
             <a:endParaRPr lang="en-US" dirty="0"/>
           </a:p>
@@ -1853,11 +1852,7 @@
           <a:p>
             <a:r>
               <a:rPr lang="en-US" dirty="0"/>
-              <a:t>Notas: A distorção nos polos da esférica é o ponto mais visual — mostrar como o checker "aperta" no topo e na base. A cúbica é a mais usada para props do kit modular nesta fase. Não entrar em Smart UV Project ainda (é a demonstração).
-FIGURA (produzir) — assets/projecao_esferica_cubica.webp
-Objetivo: evidenciar onde cada projeção falha — os polos na esférica e as arestas na cúbica — para o estudante reconhecer o padrão no próprio trabalho.
-Descrição: à esquerda, uma esfera com projeção esférica e o checker comprimido nos polos; à direita, um cubo com Cube Projection e checker uniforme nas seis faces.
-Como produzir: no Blender, aplicar Sphere Projection a uma UV Sphere e Cube Projection a um cubo, ambos com checkerboard. Capturar e comparar no Krita, destacando com uma seta a compressão nos polos.</a:t>
+              <a:t>Notas: Não é uma lista para decorar — é um repertório de primeiras tentativas. Nenhuma projeção automática é definitiva; a partir da Semana 4, seams manuais vão refinar o resultado em cima de qualquer uma dessas.</a:t>
             </a:r>
             <a:endParaRPr lang="en-US" dirty="0"/>
           </a:p>
